--- a/ペナン2ヶ月間_旅のしおり.pptx
+++ b/ペナン2ヶ月間_旅のしおり.pptx
@@ -14747,7 +14747,7 @@
               </a:defRPr>
             </a:pPr>
             <a:r>
-              <a:t>• SG Arrival Card 事前提出推奨（入国審査スムーズに）</a:t>
+              <a:t>• SG Arrival Card: 空港から出ない場合は不要（トランジットのみ）</a:t>
             </a:r>
           </a:p>
         </p:txBody>

--- a/ペナン2ヶ月間_旅のしおり.pptx
+++ b/ペナン2ヶ月間_旅のしおり.pptx
@@ -15560,7 +15560,7 @@
               </a:defRPr>
             </a:pPr>
             <a:r>
-              <a:t>📋 MDAC（Malaysia Digital Arrival Card）</a:t>
+              <a:t>📋 MDAC必須（Malaysia Digital Arrival Card）</a:t>
             </a:r>
           </a:p>
         </p:txBody>
@@ -15630,7 +15630,7 @@
               </a:defRPr>
             </a:pPr>
             <a:r>
-              <a:t>• 到着72時間前までに提出必須</a:t>
+              <a:t>• 到着72時間前〜当日の間のみ提出可能（それ以前は不可）</a:t>
             </a:r>
           </a:p>
         </p:txBody>
@@ -15665,7 +15665,7 @@
               </a:defRPr>
             </a:pPr>
             <a:r>
-              <a:t>• 無料</a:t>
+              <a:t>• 無料（ビザとは異なる）</a:t>
             </a:r>
           </a:p>
         </p:txBody>
@@ -15700,7 +15700,7 @@
               </a:defRPr>
             </a:pPr>
             <a:r>
-              <a:t>• パスポート情報・滞在先・渡航目的を入力</a:t>
+              <a:t>• 入力：パスポート情報、渡航日、宿泊先、健康状態</a:t>
             </a:r>
           </a:p>
         </p:txBody>
